--- a/Pending_VAT_Workflow.pptx
+++ b/Pending_VAT_Workflow.pptx
@@ -1702,7 +1702,7 @@
                 <a:ea typeface="Leelawadee UI Semilight" pitchFamily="34" charset="-122"/>
                 <a:cs typeface="Leelawadee UI Semilight" pitchFamily="34" charset="-120"/>
               </a:rPr>
-              <a:t>บ้าน TRUE ส่งไฟล์ทุกวัน  บ้าน DTAC ส่งทุกวันพุธ  น้องนิวอัปเดต Report ทุกวันศุกร์</a:t>
+              <a:t>ไฟล์ที่คีย์ไปหาน้องนิว  กระดาษที่ปริ้นไปหาบัญชี  Report อัปเดตทุกวันศุกร์</a:t>
             </a:r>
             <a:endParaRPr lang="th-TH" sz="1400" dirty="0"/>
           </a:p>
@@ -2148,7 +2148,178 @@
         </p:nvSpPr>
         <p:spPr>
           <a:xfrm>
-            <a:off x="5349240" y="2491740"/>
+            <a:off x="5349240" y="1737360"/>
+            <a:ext cx="1828800" cy="1097280"/>
+          </a:xfrm>
+          <a:prstGeom prst="roundRect">
+            <a:avLst>
+              <a:gd name="adj" fmla="val 6667"/>
+            </a:avLst>
+          </a:prstGeom>
+          <a:solidFill>
+            <a:srgbClr val="F1EFEA"/>
+          </a:solidFill>
+          <a:ln w="12700">
+            <a:solidFill>
+              <a:srgbClr val="F1EFEA"/>
+            </a:solidFill>
+            <a:prstDash val="solid"/>
+          </a:ln>
+        </p:spPr>
+      </p:sp>
+      <p:sp>
+        <p:nvSpPr>
+          <p:cNvPr id="18" name="Text 16"/>
+          <p:cNvSpPr/>
+          <p:nvPr/>
+        </p:nvSpPr>
+        <p:spPr>
+          <a:xfrm>
+            <a:off x="5513832" y="1874520"/>
+            <a:ext cx="1499616" cy="329184"/>
+          </a:xfrm>
+          <a:prstGeom prst="rect">
+            <a:avLst/>
+          </a:prstGeom>
+          <a:noFill/>
+          <a:ln/>
+        </p:spPr>
+        <p:txBody>
+          <a:bodyPr wrap="square" lIns="0" tIns="0" rIns="0" bIns="0" rtlCol="0" anchor="t"/>
+          <a:lstStyle/>
+          <a:p>
+            <a:pPr indent="0" marL="0">
+              <a:buNone/>
+            </a:pPr>
+            <a:r>
+              <a:rPr lang="th-TH" altLang="en-US" sz="1500" b="1" dirty="0">
+                <a:solidFill>
+                  <a:srgbClr val="23221F"/>
+                </a:solidFill>
+                <a:latin typeface="Leelawadee UI" pitchFamily="34" charset="0"/>
+                <a:ea typeface="Leelawadee UI" pitchFamily="34" charset="-122"/>
+                <a:cs typeface="Leelawadee UI" pitchFamily="34" charset="-120"/>
+              </a:rPr>
+              <a:t>ส่งให้บัญชี</a:t>
+            </a:r>
+            <a:endParaRPr lang="th-TH" sz="1500" dirty="0"/>
+          </a:p>
+        </p:txBody>
+      </p:sp>
+      <p:sp>
+        <p:nvSpPr>
+          <p:cNvPr id="19" name="Text 17"/>
+          <p:cNvSpPr/>
+          <p:nvPr/>
+        </p:nvSpPr>
+        <p:spPr>
+          <a:xfrm>
+            <a:off x="5513832" y="2212848"/>
+            <a:ext cx="1499616" cy="292608"/>
+          </a:xfrm>
+          <a:prstGeom prst="rect">
+            <a:avLst/>
+          </a:prstGeom>
+          <a:noFill/>
+          <a:ln/>
+        </p:spPr>
+        <p:txBody>
+          <a:bodyPr wrap="square" lIns="0" tIns="0" rIns="0" bIns="0" rtlCol="0" anchor="t"/>
+          <a:lstStyle/>
+          <a:p>
+            <a:pPr indent="0" marL="0">
+              <a:buNone/>
+            </a:pPr>
+            <a:r>
+              <a:rPr lang="th-TH" altLang="en-US" sz="1200" dirty="0">
+                <a:solidFill>
+                  <a:srgbClr val="77736B"/>
+                </a:solidFill>
+                <a:latin typeface="Leelawadee UI Semilight" pitchFamily="34" charset="0"/>
+                <a:ea typeface="Leelawadee UI Semilight" pitchFamily="34" charset="-122"/>
+                <a:cs typeface="Leelawadee UI Semilight" pitchFamily="34" charset="-120"/>
+              </a:rPr>
+              <a:t>กระดาษที่ปริ้น</a:t>
+            </a:r>
+            <a:endParaRPr lang="th-TH" sz="1200" dirty="0"/>
+          </a:p>
+        </p:txBody>
+      </p:sp>
+      <p:sp>
+        <p:nvSpPr>
+          <p:cNvPr id="20" name="Shape 18"/>
+          <p:cNvSpPr/>
+          <p:nvPr/>
+        </p:nvSpPr>
+        <p:spPr>
+          <a:xfrm>
+            <a:off x="5513832" y="2468880"/>
+            <a:ext cx="822960" cy="310896"/>
+          </a:xfrm>
+          <a:prstGeom prst="roundRect">
+            <a:avLst>
+              <a:gd name="adj" fmla="val 50000"/>
+            </a:avLst>
+          </a:prstGeom>
+          <a:solidFill>
+            <a:srgbClr val="E7E4DD"/>
+          </a:solidFill>
+          <a:ln w="12700">
+            <a:solidFill>
+              <a:srgbClr val="E7E4DD"/>
+            </a:solidFill>
+            <a:prstDash val="solid"/>
+          </a:ln>
+        </p:spPr>
+      </p:sp>
+      <p:sp>
+        <p:nvSpPr>
+          <p:cNvPr id="21" name="Text 19"/>
+          <p:cNvSpPr/>
+          <p:nvPr/>
+        </p:nvSpPr>
+        <p:spPr>
+          <a:xfrm>
+            <a:off x="5513832" y="2468880"/>
+            <a:ext cx="822960" cy="310896"/>
+          </a:xfrm>
+          <a:prstGeom prst="rect">
+            <a:avLst/>
+          </a:prstGeom>
+          <a:noFill/>
+          <a:ln/>
+        </p:spPr>
+        <p:txBody>
+          <a:bodyPr wrap="square" lIns="0" tIns="0" rIns="0" bIns="0" rtlCol="0" anchor="ctr"/>
+          <a:lstStyle/>
+          <a:p>
+            <a:pPr algn="ctr" indent="0" marL="0">
+              <a:buNone/>
+            </a:pPr>
+            <a:r>
+              <a:rPr lang="th-TH" altLang="en-US" sz="1100" b="1" dirty="0">
+                <a:solidFill>
+                  <a:srgbClr val="77736B"/>
+                </a:solidFill>
+                <a:latin typeface="Leelawadee UI" pitchFamily="34" charset="0"/>
+                <a:ea typeface="Leelawadee UI" pitchFamily="34" charset="-122"/>
+                <a:cs typeface="Leelawadee UI" pitchFamily="34" charset="-120"/>
+              </a:rPr>
+              <a:t>ทุกวัน</a:t>
+            </a:r>
+            <a:endParaRPr lang="th-TH" sz="1100" dirty="0"/>
+          </a:p>
+        </p:txBody>
+      </p:sp>
+      <p:sp>
+        <p:nvSpPr>
+          <p:cNvPr id="22" name="Shape 20"/>
+          <p:cNvSpPr/>
+          <p:nvPr/>
+        </p:nvSpPr>
+        <p:spPr>
+          <a:xfrm>
+            <a:off x="5349240" y="2971800"/>
             <a:ext cx="1828800" cy="1097280"/>
           </a:xfrm>
           <a:prstGeom prst="roundRect">
@@ -2169,13 +2340,13 @@
       </p:sp>
       <p:sp>
         <p:nvSpPr>
-          <p:cNvPr id="18" name="Text 16"/>
-          <p:cNvSpPr/>
-          <p:nvPr/>
-        </p:nvSpPr>
-        <p:spPr>
-          <a:xfrm>
-            <a:off x="5513832" y="2628900"/>
+          <p:cNvPr id="23" name="Text 21"/>
+          <p:cNvSpPr/>
+          <p:nvPr/>
+        </p:nvSpPr>
+        <p:spPr>
+          <a:xfrm>
+            <a:off x="5513832" y="3108960"/>
             <a:ext cx="1499616" cy="329184"/>
           </a:xfrm>
           <a:prstGeom prst="rect">
@@ -2208,13 +2379,13 @@
       </p:sp>
       <p:sp>
         <p:nvSpPr>
-          <p:cNvPr id="19" name="Text 17"/>
-          <p:cNvSpPr/>
-          <p:nvPr/>
-        </p:nvSpPr>
-        <p:spPr>
-          <a:xfrm>
-            <a:off x="5513832" y="2967228"/>
+          <p:cNvPr id="24" name="Text 22"/>
+          <p:cNvSpPr/>
+          <p:nvPr/>
+        </p:nvSpPr>
+        <p:spPr>
+          <a:xfrm>
+            <a:off x="5513832" y="3447288"/>
             <a:ext cx="1499616" cy="292608"/>
           </a:xfrm>
           <a:prstGeom prst="rect">
@@ -2239,7 +2410,7 @@
                 <a:ea typeface="Leelawadee UI Semilight" pitchFamily="34" charset="-122"/>
                 <a:cs typeface="Leelawadee UI Semilight" pitchFamily="34" charset="-120"/>
               </a:rPr>
-              <a:t>ไฟล์ และกระดาษที่ปริ้น</a:t>
+              <a:t>ไฟล์ที่คีย์แล้ว</a:t>
             </a:r>
             <a:endParaRPr lang="th-TH" sz="1200" dirty="0"/>
           </a:p>
@@ -2247,13 +2418,13 @@
       </p:sp>
       <p:sp>
         <p:nvSpPr>
-          <p:cNvPr id="20" name="Shape 18"/>
-          <p:cNvSpPr/>
-          <p:nvPr/>
-        </p:nvSpPr>
-        <p:spPr>
-          <a:xfrm>
-            <a:off x="5513832" y="3223260"/>
+          <p:cNvPr id="25" name="Shape 23"/>
+          <p:cNvSpPr/>
+          <p:nvPr/>
+        </p:nvSpPr>
+        <p:spPr>
+          <a:xfrm>
+            <a:off x="5513832" y="3703320"/>
             <a:ext cx="822960" cy="310896"/>
           </a:xfrm>
           <a:prstGeom prst="roundRect">
@@ -2274,13 +2445,13 @@
       </p:sp>
       <p:sp>
         <p:nvSpPr>
-          <p:cNvPr id="21" name="Text 19"/>
-          <p:cNvSpPr/>
-          <p:nvPr/>
-        </p:nvSpPr>
-        <p:spPr>
-          <a:xfrm>
-            <a:off x="5513832" y="3223260"/>
+          <p:cNvPr id="26" name="Text 24"/>
+          <p:cNvSpPr/>
+          <p:nvPr/>
+        </p:nvSpPr>
+        <p:spPr>
+          <a:xfrm>
+            <a:off x="5513832" y="3703320"/>
             <a:ext cx="822960" cy="310896"/>
           </a:xfrm>
           <a:prstGeom prst="rect">
@@ -2313,13 +2484,13 @@
       </p:sp>
       <p:sp>
         <p:nvSpPr>
-          <p:cNvPr id="22" name="Text 20"/>
-          <p:cNvSpPr/>
-          <p:nvPr/>
-        </p:nvSpPr>
-        <p:spPr>
-          <a:xfrm>
-            <a:off x="594360" y="4434840"/>
+          <p:cNvPr id="27" name="Text 25"/>
+          <p:cNvSpPr/>
+          <p:nvPr/>
+        </p:nvSpPr>
+        <p:spPr>
+          <a:xfrm>
+            <a:off x="594360" y="4480560"/>
             <a:ext cx="2194560" cy="256032"/>
           </a:xfrm>
           <a:prstGeom prst="rect">
@@ -2352,13 +2523,13 @@
       </p:sp>
       <p:sp>
         <p:nvSpPr>
-          <p:cNvPr id="23" name="Shape 21"/>
-          <p:cNvSpPr/>
-          <p:nvPr/>
-        </p:nvSpPr>
-        <p:spPr>
-          <a:xfrm>
-            <a:off x="594360" y="4754880"/>
+          <p:cNvPr id="28" name="Shape 26"/>
+          <p:cNvSpPr/>
+          <p:nvPr/>
+        </p:nvSpPr>
+        <p:spPr>
+          <a:xfrm>
+            <a:off x="594360" y="4800600"/>
             <a:ext cx="2194560" cy="868680"/>
           </a:xfrm>
           <a:prstGeom prst="roundRect">
@@ -2379,13 +2550,13 @@
       </p:sp>
       <p:sp>
         <p:nvSpPr>
-          <p:cNvPr id="24" name="Text 22"/>
-          <p:cNvSpPr/>
-          <p:nvPr/>
-        </p:nvSpPr>
-        <p:spPr>
-          <a:xfrm>
-            <a:off x="758952" y="4892040"/>
+          <p:cNvPr id="29" name="Text 27"/>
+          <p:cNvSpPr/>
+          <p:nvPr/>
+        </p:nvSpPr>
+        <p:spPr>
+          <a:xfrm>
+            <a:off x="758952" y="4937760"/>
             <a:ext cx="1865376" cy="329184"/>
           </a:xfrm>
           <a:prstGeom prst="rect">
@@ -2418,13 +2589,13 @@
       </p:sp>
       <p:sp>
         <p:nvSpPr>
-          <p:cNvPr id="25" name="Text 23"/>
-          <p:cNvSpPr/>
-          <p:nvPr/>
-        </p:nvSpPr>
-        <p:spPr>
-          <a:xfrm>
-            <a:off x="758952" y="5230368"/>
+          <p:cNvPr id="30" name="Text 28"/>
+          <p:cNvSpPr/>
+          <p:nvPr/>
+        </p:nvSpPr>
+        <p:spPr>
+          <a:xfrm>
+            <a:off x="758952" y="5276088"/>
             <a:ext cx="1865376" cy="292608"/>
           </a:xfrm>
           <a:prstGeom prst="rect">
@@ -2457,18 +2628,18 @@
       </p:sp>
       <p:sp>
         <p:nvSpPr>
-          <p:cNvPr id="26" name="Shape 24"/>
-          <p:cNvSpPr/>
-          <p:nvPr/>
-        </p:nvSpPr>
-        <p:spPr>
-          <a:xfrm>
-            <a:off x="5349240" y="4640580"/>
-            <a:ext cx="1828800" cy="1097280"/>
+          <p:cNvPr id="31" name="Shape 29"/>
+          <p:cNvSpPr/>
+          <p:nvPr/>
+        </p:nvSpPr>
+        <p:spPr>
+          <a:xfrm>
+            <a:off x="3154680" y="4800600"/>
+            <a:ext cx="1828800" cy="868680"/>
           </a:xfrm>
           <a:prstGeom prst="roundRect">
             <a:avLst>
-              <a:gd name="adj" fmla="val 6667"/>
+              <a:gd name="adj" fmla="val 8421"/>
             </a:avLst>
           </a:prstGeom>
           <a:solidFill>
@@ -2484,13 +2655,13 @@
       </p:sp>
       <p:sp>
         <p:nvSpPr>
-          <p:cNvPr id="27" name="Text 25"/>
-          <p:cNvSpPr/>
-          <p:nvPr/>
-        </p:nvSpPr>
-        <p:spPr>
-          <a:xfrm>
-            <a:off x="5513832" y="4777740"/>
+          <p:cNvPr id="32" name="Text 30"/>
+          <p:cNvSpPr/>
+          <p:nvPr/>
+        </p:nvSpPr>
+        <p:spPr>
+          <a:xfrm>
+            <a:off x="3319272" y="4937760"/>
             <a:ext cx="1499616" cy="329184"/>
           </a:xfrm>
           <a:prstGeom prst="rect">
@@ -2515,6 +2686,72 @@
                 <a:ea typeface="Leelawadee UI" pitchFamily="34" charset="-122"/>
                 <a:cs typeface="Leelawadee UI" pitchFamily="34" charset="-120"/>
               </a:rPr>
+              <a:t>คีย์ลงไฟล์</a:t>
+            </a:r>
+            <a:endParaRPr lang="th-TH" sz="1500" dirty="0"/>
+          </a:p>
+        </p:txBody>
+      </p:sp>
+      <p:sp>
+        <p:nvSpPr>
+          <p:cNvPr id="33" name="Shape 31"/>
+          <p:cNvSpPr/>
+          <p:nvPr/>
+        </p:nvSpPr>
+        <p:spPr>
+          <a:xfrm>
+            <a:off x="5349240" y="4686300"/>
+            <a:ext cx="1828800" cy="1097280"/>
+          </a:xfrm>
+          <a:prstGeom prst="roundRect">
+            <a:avLst>
+              <a:gd name="adj" fmla="val 6667"/>
+            </a:avLst>
+          </a:prstGeom>
+          <a:solidFill>
+            <a:srgbClr val="FFFFFF"/>
+          </a:solidFill>
+          <a:ln w="12700">
+            <a:solidFill>
+              <a:srgbClr val="E4E2DC"/>
+            </a:solidFill>
+            <a:prstDash val="solid"/>
+          </a:ln>
+        </p:spPr>
+      </p:sp>
+      <p:sp>
+        <p:nvSpPr>
+          <p:cNvPr id="34" name="Text 32"/>
+          <p:cNvSpPr/>
+          <p:nvPr/>
+        </p:nvSpPr>
+        <p:spPr>
+          <a:xfrm>
+            <a:off x="5513832" y="4823460"/>
+            <a:ext cx="1499616" cy="329184"/>
+          </a:xfrm>
+          <a:prstGeom prst="rect">
+            <a:avLst/>
+          </a:prstGeom>
+          <a:noFill/>
+          <a:ln/>
+        </p:spPr>
+        <p:txBody>
+          <a:bodyPr wrap="square" lIns="0" tIns="0" rIns="0" bIns="0" rtlCol="0" anchor="t"/>
+          <a:lstStyle/>
+          <a:p>
+            <a:pPr indent="0" marL="0">
+              <a:buNone/>
+            </a:pPr>
+            <a:r>
+              <a:rPr lang="th-TH" altLang="en-US" sz="1500" b="1" dirty="0">
+                <a:solidFill>
+                  <a:srgbClr val="23221F"/>
+                </a:solidFill>
+                <a:latin typeface="Leelawadee UI" pitchFamily="34" charset="0"/>
+                <a:ea typeface="Leelawadee UI" pitchFamily="34" charset="-122"/>
+                <a:cs typeface="Leelawadee UI" pitchFamily="34" charset="-120"/>
+              </a:rPr>
               <a:t>ส่งให้น้องนิว</a:t>
             </a:r>
             <a:endParaRPr lang="th-TH" sz="1500" dirty="0"/>
@@ -2523,13 +2760,13 @@
       </p:sp>
       <p:sp>
         <p:nvSpPr>
-          <p:cNvPr id="28" name="Text 26"/>
-          <p:cNvSpPr/>
-          <p:nvPr/>
-        </p:nvSpPr>
-        <p:spPr>
-          <a:xfrm>
-            <a:off x="5513832" y="5116068"/>
+          <p:cNvPr id="35" name="Text 33"/>
+          <p:cNvSpPr/>
+          <p:nvPr/>
+        </p:nvSpPr>
+        <p:spPr>
+          <a:xfrm>
+            <a:off x="5513832" y="5161788"/>
             <a:ext cx="1499616" cy="292608"/>
           </a:xfrm>
           <a:prstGeom prst="rect">
@@ -2554,7 +2791,7 @@
                 <a:ea typeface="Leelawadee UI Semilight" pitchFamily="34" charset="-122"/>
                 <a:cs typeface="Leelawadee UI Semilight" pitchFamily="34" charset="-120"/>
               </a:rPr>
-              <a:t>ไฟล์</a:t>
+              <a:t>ไฟล์ที่คีย์แล้ว</a:t>
             </a:r>
             <a:endParaRPr lang="th-TH" sz="1200" dirty="0"/>
           </a:p>
@@ -2562,13 +2799,13 @@
       </p:sp>
       <p:sp>
         <p:nvSpPr>
-          <p:cNvPr id="29" name="Shape 27"/>
-          <p:cNvSpPr/>
-          <p:nvPr/>
-        </p:nvSpPr>
-        <p:spPr>
-          <a:xfrm>
-            <a:off x="5513832" y="5372100"/>
+          <p:cNvPr id="36" name="Shape 34"/>
+          <p:cNvSpPr/>
+          <p:nvPr/>
+        </p:nvSpPr>
+        <p:spPr>
+          <a:xfrm>
+            <a:off x="5513832" y="5417820"/>
             <a:ext cx="1051560" cy="310896"/>
           </a:xfrm>
           <a:prstGeom prst="roundRect">
@@ -2589,13 +2826,13 @@
       </p:sp>
       <p:sp>
         <p:nvSpPr>
-          <p:cNvPr id="30" name="Text 28"/>
-          <p:cNvSpPr/>
-          <p:nvPr/>
-        </p:nvSpPr>
-        <p:spPr>
-          <a:xfrm>
-            <a:off x="5513832" y="5372100"/>
+          <p:cNvPr id="37" name="Text 35"/>
+          <p:cNvSpPr/>
+          <p:nvPr/>
+        </p:nvSpPr>
+        <p:spPr>
+          <a:xfrm>
+            <a:off x="5513832" y="5417820"/>
             <a:ext cx="1051560" cy="310896"/>
           </a:xfrm>
           <a:prstGeom prst="rect">
@@ -2628,13 +2865,13 @@
       </p:sp>
       <p:sp>
         <p:nvSpPr>
-          <p:cNvPr id="31" name="Shape 29"/>
-          <p:cNvSpPr/>
-          <p:nvPr/>
-        </p:nvSpPr>
-        <p:spPr>
-          <a:xfrm>
-            <a:off x="7543800" y="3383280"/>
+          <p:cNvPr id="38" name="Shape 36"/>
+          <p:cNvSpPr/>
+          <p:nvPr/>
+        </p:nvSpPr>
+        <p:spPr>
+          <a:xfrm>
+            <a:off x="7543800" y="3646170"/>
             <a:ext cx="2011680" cy="1463040"/>
           </a:xfrm>
           <a:prstGeom prst="roundRect">
@@ -2655,13 +2892,13 @@
       </p:sp>
       <p:sp>
         <p:nvSpPr>
-          <p:cNvPr id="32" name="Text 30"/>
-          <p:cNvSpPr/>
-          <p:nvPr/>
-        </p:nvSpPr>
-        <p:spPr>
-          <a:xfrm>
-            <a:off x="7708392" y="3520440"/>
+          <p:cNvPr id="39" name="Text 37"/>
+          <p:cNvSpPr/>
+          <p:nvPr/>
+        </p:nvSpPr>
+        <p:spPr>
+          <a:xfrm>
+            <a:off x="7708392" y="3783330"/>
             <a:ext cx="1737360" cy="365760"/>
           </a:xfrm>
           <a:prstGeom prst="rect">
@@ -2694,13 +2931,13 @@
       </p:sp>
       <p:sp>
         <p:nvSpPr>
-          <p:cNvPr id="33" name="Text 31"/>
-          <p:cNvSpPr/>
-          <p:nvPr/>
-        </p:nvSpPr>
-        <p:spPr>
-          <a:xfrm>
-            <a:off x="7708392" y="3913632"/>
+          <p:cNvPr id="40" name="Text 38"/>
+          <p:cNvSpPr/>
+          <p:nvPr/>
+        </p:nvSpPr>
+        <p:spPr>
+          <a:xfrm>
+            <a:off x="7708392" y="4176522"/>
             <a:ext cx="1737360" cy="292608"/>
           </a:xfrm>
           <a:prstGeom prst="rect">
@@ -2733,13 +2970,13 @@
       </p:sp>
       <p:sp>
         <p:nvSpPr>
-          <p:cNvPr id="34" name="Shape 32"/>
-          <p:cNvSpPr/>
-          <p:nvPr/>
-        </p:nvSpPr>
-        <p:spPr>
-          <a:xfrm>
-            <a:off x="7708392" y="4315968"/>
+          <p:cNvPr id="41" name="Shape 39"/>
+          <p:cNvSpPr/>
+          <p:nvPr/>
+        </p:nvSpPr>
+        <p:spPr>
+          <a:xfrm>
+            <a:off x="7708392" y="4578858"/>
             <a:ext cx="1682496" cy="310896"/>
           </a:xfrm>
           <a:prstGeom prst="roundRect">
@@ -2760,13 +2997,13 @@
       </p:sp>
       <p:sp>
         <p:nvSpPr>
-          <p:cNvPr id="35" name="Text 33"/>
-          <p:cNvSpPr/>
-          <p:nvPr/>
-        </p:nvSpPr>
-        <p:spPr>
-          <a:xfrm>
-            <a:off x="7708392" y="4315968"/>
+          <p:cNvPr id="42" name="Text 40"/>
+          <p:cNvSpPr/>
+          <p:nvPr/>
+        </p:nvSpPr>
+        <p:spPr>
+          <a:xfrm>
+            <a:off x="7708392" y="4578858"/>
             <a:ext cx="1682496" cy="310896"/>
           </a:xfrm>
           <a:prstGeom prst="rect">
@@ -2799,13 +3036,13 @@
       </p:sp>
       <p:sp>
         <p:nvSpPr>
-          <p:cNvPr id="36" name="Shape 34"/>
-          <p:cNvSpPr/>
-          <p:nvPr/>
-        </p:nvSpPr>
-        <p:spPr>
-          <a:xfrm>
-            <a:off x="9921240" y="3566160"/>
+          <p:cNvPr id="43" name="Shape 41"/>
+          <p:cNvSpPr/>
+          <p:nvPr/>
+        </p:nvSpPr>
+        <p:spPr>
+          <a:xfrm>
+            <a:off x="9921240" y="3829050"/>
             <a:ext cx="1645920" cy="1097280"/>
           </a:xfrm>
           <a:prstGeom prst="roundRect">
@@ -2826,13 +3063,13 @@
       </p:sp>
       <p:sp>
         <p:nvSpPr>
-          <p:cNvPr id="37" name="Text 35"/>
-          <p:cNvSpPr/>
-          <p:nvPr/>
-        </p:nvSpPr>
-        <p:spPr>
-          <a:xfrm>
-            <a:off x="10085832" y="3703320"/>
+          <p:cNvPr id="44" name="Text 42"/>
+          <p:cNvSpPr/>
+          <p:nvPr/>
+        </p:nvSpPr>
+        <p:spPr>
+          <a:xfrm>
+            <a:off x="10085832" y="3966210"/>
             <a:ext cx="1316736" cy="329184"/>
           </a:xfrm>
           <a:prstGeom prst="rect">
@@ -2865,13 +3102,13 @@
       </p:sp>
       <p:sp>
         <p:nvSpPr>
-          <p:cNvPr id="38" name="Shape 36"/>
-          <p:cNvSpPr/>
-          <p:nvPr/>
-        </p:nvSpPr>
-        <p:spPr>
-          <a:xfrm>
-            <a:off x="10085832" y="4133088"/>
+          <p:cNvPr id="45" name="Shape 43"/>
+          <p:cNvSpPr/>
+          <p:nvPr/>
+        </p:nvSpPr>
+        <p:spPr>
+          <a:xfrm>
+            <a:off x="10085832" y="4395978"/>
             <a:ext cx="1097280" cy="310896"/>
           </a:xfrm>
           <a:prstGeom prst="roundRect">
@@ -2892,13 +3129,13 @@
       </p:sp>
       <p:sp>
         <p:nvSpPr>
-          <p:cNvPr id="39" name="Text 37"/>
-          <p:cNvSpPr/>
-          <p:nvPr/>
-        </p:nvSpPr>
-        <p:spPr>
-          <a:xfrm>
-            <a:off x="10085832" y="4133088"/>
+          <p:cNvPr id="46" name="Text 44"/>
+          <p:cNvSpPr/>
+          <p:nvPr/>
+        </p:nvSpPr>
+        <p:spPr>
+          <a:xfrm>
+            <a:off x="10085832" y="4395978"/>
             <a:ext cx="1097280" cy="310896"/>
           </a:xfrm>
           <a:prstGeom prst="rect">
@@ -2931,7 +3168,7 @@
       </p:sp>
       <p:sp>
         <p:nvSpPr>
-          <p:cNvPr id="40" name="Shape 38"/>
+          <p:cNvPr id="47" name="Shape 45"/>
           <p:cNvSpPr/>
           <p:nvPr/>
         </p:nvSpPr>
@@ -2954,7 +3191,7 @@
       </p:sp>
       <p:sp>
         <p:nvSpPr>
-          <p:cNvPr id="41" name="Shape 39"/>
+          <p:cNvPr id="48" name="Shape 46"/>
           <p:cNvSpPr/>
           <p:nvPr/>
         </p:nvSpPr>
@@ -2977,7 +3214,7 @@
       </p:sp>
       <p:sp>
         <p:nvSpPr>
-          <p:cNvPr id="42" name="Shape 40"/>
+          <p:cNvPr id="49" name="Shape 47"/>
           <p:cNvSpPr/>
           <p:nvPr/>
         </p:nvSpPr>
@@ -3000,7 +3237,7 @@
       </p:sp>
       <p:sp>
         <p:nvSpPr>
-          <p:cNvPr id="43" name="Shape 41"/>
+          <p:cNvPr id="50" name="Shape 48"/>
           <p:cNvSpPr/>
           <p:nvPr/>
         </p:nvSpPr>
@@ -3024,14 +3261,60 @@
       </p:sp>
       <p:sp>
         <p:nvSpPr>
-          <p:cNvPr id="44" name="Shape 42"/>
+          <p:cNvPr id="51" name="Shape 49"/>
           <p:cNvSpPr/>
           <p:nvPr/>
         </p:nvSpPr>
         <p:spPr>
           <a:xfrm>
             <a:off x="4983480" y="3040380"/>
-            <a:ext cx="365760" cy="0"/>
+            <a:ext cx="182880" cy="0"/>
+          </a:xfrm>
+          <a:prstGeom prst="line">
+            <a:avLst/>
+          </a:prstGeom>
+          <a:noFill/>
+          <a:ln w="15875">
+            <a:solidFill>
+              <a:srgbClr val="A9A49A"/>
+            </a:solidFill>
+            <a:prstDash val="solid"/>
+          </a:ln>
+        </p:spPr>
+      </p:sp>
+      <p:sp>
+        <p:nvSpPr>
+          <p:cNvPr id="52" name="Shape 50"/>
+          <p:cNvSpPr/>
+          <p:nvPr/>
+        </p:nvSpPr>
+        <p:spPr>
+          <a:xfrm>
+            <a:off x="5166360" y="2286000"/>
+            <a:ext cx="0" cy="1234440"/>
+          </a:xfrm>
+          <a:prstGeom prst="line">
+            <a:avLst/>
+          </a:prstGeom>
+          <a:noFill/>
+          <a:ln w="15875">
+            <a:solidFill>
+              <a:srgbClr val="A9A49A"/>
+            </a:solidFill>
+            <a:prstDash val="solid"/>
+          </a:ln>
+        </p:spPr>
+      </p:sp>
+      <p:sp>
+        <p:nvSpPr>
+          <p:cNvPr id="53" name="Shape 51"/>
+          <p:cNvSpPr/>
+          <p:nvPr/>
+        </p:nvSpPr>
+        <p:spPr>
+          <a:xfrm>
+            <a:off x="5166360" y="2286000"/>
+            <a:ext cx="182880" cy="0"/>
           </a:xfrm>
           <a:prstGeom prst="line">
             <a:avLst/>
@@ -3048,14 +3331,14 @@
       </p:sp>
       <p:sp>
         <p:nvSpPr>
-          <p:cNvPr id="45" name="Shape 43"/>
-          <p:cNvSpPr/>
-          <p:nvPr/>
-        </p:nvSpPr>
-        <p:spPr>
-          <a:xfrm>
-            <a:off x="2788920" y="5189220"/>
-            <a:ext cx="2560320" cy="0"/>
+          <p:cNvPr id="54" name="Shape 52"/>
+          <p:cNvSpPr/>
+          <p:nvPr/>
+        </p:nvSpPr>
+        <p:spPr>
+          <a:xfrm>
+            <a:off x="5166360" y="3520440"/>
+            <a:ext cx="182880" cy="0"/>
           </a:xfrm>
           <a:prstGeom prst="line">
             <a:avLst/>
@@ -3072,83 +3355,14 @@
       </p:sp>
       <p:sp>
         <p:nvSpPr>
-          <p:cNvPr id="46" name="Shape 44"/>
-          <p:cNvSpPr/>
-          <p:nvPr/>
-        </p:nvSpPr>
-        <p:spPr>
-          <a:xfrm>
-            <a:off x="7178040" y="3040380"/>
-            <a:ext cx="182880" cy="0"/>
-          </a:xfrm>
-          <a:prstGeom prst="line">
-            <a:avLst/>
-          </a:prstGeom>
-          <a:noFill/>
-          <a:ln w="15875">
-            <a:solidFill>
-              <a:srgbClr val="A9A49A"/>
-            </a:solidFill>
-            <a:prstDash val="solid"/>
-          </a:ln>
-        </p:spPr>
-      </p:sp>
-      <p:sp>
-        <p:nvSpPr>
-          <p:cNvPr id="47" name="Shape 45"/>
-          <p:cNvSpPr/>
-          <p:nvPr/>
-        </p:nvSpPr>
-        <p:spPr>
-          <a:xfrm>
-            <a:off x="7178040" y="5189220"/>
-            <a:ext cx="182880" cy="0"/>
-          </a:xfrm>
-          <a:prstGeom prst="line">
-            <a:avLst/>
-          </a:prstGeom>
-          <a:noFill/>
-          <a:ln w="15875">
-            <a:solidFill>
-              <a:srgbClr val="A9A49A"/>
-            </a:solidFill>
-            <a:prstDash val="solid"/>
-          </a:ln>
-        </p:spPr>
-      </p:sp>
-      <p:sp>
-        <p:nvSpPr>
-          <p:cNvPr id="48" name="Shape 46"/>
-          <p:cNvSpPr/>
-          <p:nvPr/>
-        </p:nvSpPr>
-        <p:spPr>
-          <a:xfrm>
-            <a:off x="7360920" y="3040380"/>
-            <a:ext cx="0" cy="2148840"/>
-          </a:xfrm>
-          <a:prstGeom prst="line">
-            <a:avLst/>
-          </a:prstGeom>
-          <a:noFill/>
-          <a:ln w="15875">
-            <a:solidFill>
-              <a:srgbClr val="A9A49A"/>
-            </a:solidFill>
-            <a:prstDash val="solid"/>
-          </a:ln>
-        </p:spPr>
-      </p:sp>
-      <p:sp>
-        <p:nvSpPr>
-          <p:cNvPr id="49" name="Shape 47"/>
-          <p:cNvSpPr/>
-          <p:nvPr/>
-        </p:nvSpPr>
-        <p:spPr>
-          <a:xfrm>
-            <a:off x="7360920" y="4114800"/>
-            <a:ext cx="182880" cy="0"/>
+          <p:cNvPr id="55" name="Shape 53"/>
+          <p:cNvSpPr/>
+          <p:nvPr/>
+        </p:nvSpPr>
+        <p:spPr>
+          <a:xfrm>
+            <a:off x="2788920" y="5234940"/>
+            <a:ext cx="365760" cy="0"/>
           </a:xfrm>
           <a:prstGeom prst="line">
             <a:avLst/>
@@ -3165,13 +3379,130 @@
       </p:sp>
       <p:sp>
         <p:nvSpPr>
-          <p:cNvPr id="50" name="Shape 48"/>
-          <p:cNvSpPr/>
-          <p:nvPr/>
-        </p:nvSpPr>
-        <p:spPr>
-          <a:xfrm>
-            <a:off x="9555480" y="4114800"/>
+          <p:cNvPr id="56" name="Shape 54"/>
+          <p:cNvSpPr/>
+          <p:nvPr/>
+        </p:nvSpPr>
+        <p:spPr>
+          <a:xfrm>
+            <a:off x="4983480" y="5234940"/>
+            <a:ext cx="365760" cy="0"/>
+          </a:xfrm>
+          <a:prstGeom prst="line">
+            <a:avLst/>
+          </a:prstGeom>
+          <a:noFill/>
+          <a:ln w="15875">
+            <a:solidFill>
+              <a:srgbClr val="A9A49A"/>
+            </a:solidFill>
+            <a:prstDash val="solid"/>
+            <a:tailEnd type="triangle"/>
+          </a:ln>
+        </p:spPr>
+      </p:sp>
+      <p:sp>
+        <p:nvSpPr>
+          <p:cNvPr id="57" name="Shape 55"/>
+          <p:cNvSpPr/>
+          <p:nvPr/>
+        </p:nvSpPr>
+        <p:spPr>
+          <a:xfrm>
+            <a:off x="7178040" y="3520440"/>
+            <a:ext cx="182880" cy="0"/>
+          </a:xfrm>
+          <a:prstGeom prst="line">
+            <a:avLst/>
+          </a:prstGeom>
+          <a:noFill/>
+          <a:ln w="15875">
+            <a:solidFill>
+              <a:srgbClr val="A9A49A"/>
+            </a:solidFill>
+            <a:prstDash val="solid"/>
+          </a:ln>
+        </p:spPr>
+      </p:sp>
+      <p:sp>
+        <p:nvSpPr>
+          <p:cNvPr id="58" name="Shape 56"/>
+          <p:cNvSpPr/>
+          <p:nvPr/>
+        </p:nvSpPr>
+        <p:spPr>
+          <a:xfrm>
+            <a:off x="7178040" y="5234940"/>
+            <a:ext cx="182880" cy="0"/>
+          </a:xfrm>
+          <a:prstGeom prst="line">
+            <a:avLst/>
+          </a:prstGeom>
+          <a:noFill/>
+          <a:ln w="15875">
+            <a:solidFill>
+              <a:srgbClr val="A9A49A"/>
+            </a:solidFill>
+            <a:prstDash val="solid"/>
+          </a:ln>
+        </p:spPr>
+      </p:sp>
+      <p:sp>
+        <p:nvSpPr>
+          <p:cNvPr id="59" name="Shape 57"/>
+          <p:cNvSpPr/>
+          <p:nvPr/>
+        </p:nvSpPr>
+        <p:spPr>
+          <a:xfrm>
+            <a:off x="7360920" y="3520440"/>
+            <a:ext cx="0" cy="1714500"/>
+          </a:xfrm>
+          <a:prstGeom prst="line">
+            <a:avLst/>
+          </a:prstGeom>
+          <a:noFill/>
+          <a:ln w="15875">
+            <a:solidFill>
+              <a:srgbClr val="A9A49A"/>
+            </a:solidFill>
+            <a:prstDash val="solid"/>
+          </a:ln>
+        </p:spPr>
+      </p:sp>
+      <p:sp>
+        <p:nvSpPr>
+          <p:cNvPr id="60" name="Shape 58"/>
+          <p:cNvSpPr/>
+          <p:nvPr/>
+        </p:nvSpPr>
+        <p:spPr>
+          <a:xfrm>
+            <a:off x="7360920" y="4377690"/>
+            <a:ext cx="182880" cy="0"/>
+          </a:xfrm>
+          <a:prstGeom prst="line">
+            <a:avLst/>
+          </a:prstGeom>
+          <a:noFill/>
+          <a:ln w="15875">
+            <a:solidFill>
+              <a:srgbClr val="A9A49A"/>
+            </a:solidFill>
+            <a:prstDash val="solid"/>
+            <a:tailEnd type="triangle"/>
+          </a:ln>
+        </p:spPr>
+      </p:sp>
+      <p:sp>
+        <p:nvSpPr>
+          <p:cNvPr id="61" name="Shape 59"/>
+          <p:cNvSpPr/>
+          <p:nvPr/>
+        </p:nvSpPr>
+        <p:spPr>
+          <a:xfrm>
+            <a:off x="9555480" y="4377690"/>
             <a:ext cx="365760" cy="0"/>
           </a:xfrm>
           <a:prstGeom prst="line">
@@ -3422,8 +3753,8 @@
         </p:nvSpPr>
         <p:spPr>
           <a:xfrm>
-            <a:off x="822960" y="2331720"/>
-            <a:ext cx="0" cy="2834640"/>
+            <a:off x="822960" y="2240280"/>
+            <a:ext cx="0" cy="3200400"/>
           </a:xfrm>
           <a:prstGeom prst="line">
             <a:avLst/>
@@ -3445,7 +3776,7 @@
         </p:nvSpPr>
         <p:spPr>
           <a:xfrm>
-            <a:off x="594360" y="1874520"/>
+            <a:off x="594360" y="1783080"/>
             <a:ext cx="457200" cy="457200"/>
           </a:xfrm>
           <a:prstGeom prst="ellipse">
@@ -3470,7 +3801,7 @@
         </p:nvSpPr>
         <p:spPr>
           <a:xfrm>
-            <a:off x="594360" y="1874520"/>
+            <a:off x="594360" y="1783080"/>
             <a:ext cx="457200" cy="457200"/>
           </a:xfrm>
           <a:prstGeom prst="rect">
@@ -3509,7 +3840,7 @@
         </p:nvSpPr>
         <p:spPr>
           <a:xfrm>
-            <a:off x="1280160" y="1874520"/>
+            <a:off x="1280160" y="1783080"/>
             <a:ext cx="6035040" cy="329184"/>
           </a:xfrm>
           <a:prstGeom prst="rect">
@@ -3548,7 +3879,7 @@
         </p:nvSpPr>
         <p:spPr>
           <a:xfrm>
-            <a:off x="1280160" y="2203704"/>
+            <a:off x="1280160" y="2112264"/>
             <a:ext cx="6035040" cy="274320"/>
           </a:xfrm>
           <a:prstGeom prst="rect">
@@ -3587,7 +3918,7 @@
         </p:nvSpPr>
         <p:spPr>
           <a:xfrm>
-            <a:off x="594360" y="2697480"/>
+            <a:off x="594360" y="2514600"/>
             <a:ext cx="457200" cy="457200"/>
           </a:xfrm>
           <a:prstGeom prst="ellipse">
@@ -3612,7 +3943,7 @@
         </p:nvSpPr>
         <p:spPr>
           <a:xfrm>
-            <a:off x="594360" y="2697480"/>
+            <a:off x="594360" y="2514600"/>
             <a:ext cx="457200" cy="457200"/>
           </a:xfrm>
           <a:prstGeom prst="rect">
@@ -3651,7 +3982,7 @@
         </p:nvSpPr>
         <p:spPr>
           <a:xfrm>
-            <a:off x="1280160" y="2779776"/>
+            <a:off x="1280160" y="2596896"/>
             <a:ext cx="6035040" cy="329184"/>
           </a:xfrm>
           <a:prstGeom prst="rect">
@@ -3690,7 +4021,7 @@
         </p:nvSpPr>
         <p:spPr>
           <a:xfrm>
-            <a:off x="594360" y="3520440"/>
+            <a:off x="594360" y="3246120"/>
             <a:ext cx="457200" cy="457200"/>
           </a:xfrm>
           <a:prstGeom prst="ellipse">
@@ -3715,7 +4046,7 @@
         </p:nvSpPr>
         <p:spPr>
           <a:xfrm>
-            <a:off x="594360" y="3520440"/>
+            <a:off x="594360" y="3246120"/>
             <a:ext cx="457200" cy="457200"/>
           </a:xfrm>
           <a:prstGeom prst="rect">
@@ -3754,7 +4085,7 @@
         </p:nvSpPr>
         <p:spPr>
           <a:xfrm>
-            <a:off x="1280160" y="3602736"/>
+            <a:off x="1280160" y="3328416"/>
             <a:ext cx="6035040" cy="329184"/>
           </a:xfrm>
           <a:prstGeom prst="rect">
@@ -3793,7 +4124,7 @@
         </p:nvSpPr>
         <p:spPr>
           <a:xfrm>
-            <a:off x="594360" y="4343400"/>
+            <a:off x="594360" y="3977640"/>
             <a:ext cx="457200" cy="457200"/>
           </a:xfrm>
           <a:prstGeom prst="ellipse">
@@ -3818,7 +4149,7 @@
         </p:nvSpPr>
         <p:spPr>
           <a:xfrm>
-            <a:off x="594360" y="4343400"/>
+            <a:off x="594360" y="3977640"/>
             <a:ext cx="457200" cy="457200"/>
           </a:xfrm>
           <a:prstGeom prst="rect">
@@ -3857,7 +4188,7 @@
         </p:nvSpPr>
         <p:spPr>
           <a:xfrm>
-            <a:off x="1280160" y="4425696"/>
+            <a:off x="1280160" y="4059936"/>
             <a:ext cx="6035040" cy="329184"/>
           </a:xfrm>
           <a:prstGeom prst="rect">
@@ -3896,7 +4227,7 @@
         </p:nvSpPr>
         <p:spPr>
           <a:xfrm>
-            <a:off x="594360" y="5166360"/>
+            <a:off x="594360" y="4709160"/>
             <a:ext cx="457200" cy="457200"/>
           </a:xfrm>
           <a:prstGeom prst="ellipse">
@@ -3921,7 +4252,7 @@
         </p:nvSpPr>
         <p:spPr>
           <a:xfrm>
-            <a:off x="594360" y="5166360"/>
+            <a:off x="594360" y="4709160"/>
             <a:ext cx="457200" cy="457200"/>
           </a:xfrm>
           <a:prstGeom prst="rect">
@@ -3960,7 +4291,7 @@
         </p:nvSpPr>
         <p:spPr>
           <a:xfrm>
-            <a:off x="1280160" y="5166360"/>
+            <a:off x="1280160" y="4709160"/>
             <a:ext cx="6035040" cy="329184"/>
           </a:xfrm>
           <a:prstGeom prst="rect">
@@ -3999,7 +4330,7 @@
         </p:nvSpPr>
         <p:spPr>
           <a:xfrm>
-            <a:off x="1280160" y="5495544"/>
+            <a:off x="1280160" y="5038344"/>
             <a:ext cx="6035040" cy="274320"/>
           </a:xfrm>
           <a:prstGeom prst="rect">
@@ -4024,7 +4355,7 @@
                 <a:ea typeface="Leelawadee UI Semilight" pitchFamily="34" charset="-122"/>
                 <a:cs typeface="Leelawadee UI Semilight" pitchFamily="34" charset="-120"/>
               </a:rPr>
-              <a:t>แยกไฟล์ตามคนทำ ส่งทุกวัน พร้อมกระดาษที่ปริ้น</a:t>
+              <a:t>แยกไฟล์ตามคนทำ ส่งทุกวัน</a:t>
             </a:r>
             <a:endParaRPr lang="th-TH" sz="1200" dirty="0"/>
           </a:p>
@@ -4033,6 +4364,148 @@
       <p:sp>
         <p:nvSpPr>
           <p:cNvPr id="25" name="Shape 23"/>
+          <p:cNvSpPr/>
+          <p:nvPr/>
+        </p:nvSpPr>
+        <p:spPr>
+          <a:xfrm>
+            <a:off x="594360" y="5440680"/>
+            <a:ext cx="457200" cy="457200"/>
+          </a:xfrm>
+          <a:prstGeom prst="ellipse">
+            <a:avLst/>
+          </a:prstGeom>
+          <a:solidFill>
+            <a:srgbClr val="B8502E"/>
+          </a:solidFill>
+          <a:ln w="12700">
+            <a:solidFill>
+              <a:srgbClr val="B8502E"/>
+            </a:solidFill>
+            <a:prstDash val="solid"/>
+          </a:ln>
+        </p:spPr>
+      </p:sp>
+      <p:sp>
+        <p:nvSpPr>
+          <p:cNvPr id="26" name="Text 24"/>
+          <p:cNvSpPr/>
+          <p:nvPr/>
+        </p:nvSpPr>
+        <p:spPr>
+          <a:xfrm>
+            <a:off x="594360" y="5440680"/>
+            <a:ext cx="457200" cy="457200"/>
+          </a:xfrm>
+          <a:prstGeom prst="rect">
+            <a:avLst/>
+          </a:prstGeom>
+          <a:noFill/>
+          <a:ln/>
+        </p:spPr>
+        <p:txBody>
+          <a:bodyPr wrap="square" lIns="0" tIns="0" rIns="0" bIns="0" rtlCol="0" anchor="ctr"/>
+          <a:lstStyle/>
+          <a:p>
+            <a:pPr algn="ctr" indent="0" marL="0">
+              <a:buNone/>
+            </a:pPr>
+            <a:r>
+              <a:rPr lang="th-TH" altLang="en-US" sz="1500" b="1" dirty="0">
+                <a:solidFill>
+                  <a:srgbClr val="FFFFFF"/>
+                </a:solidFill>
+                <a:latin typeface="Leelawadee UI" pitchFamily="34" charset="0"/>
+                <a:ea typeface="Leelawadee UI" pitchFamily="34" charset="-122"/>
+                <a:cs typeface="Leelawadee UI" pitchFamily="34" charset="-120"/>
+              </a:rPr>
+              <a:t>6</a:t>
+            </a:r>
+            <a:endParaRPr lang="th-TH" sz="1500" dirty="0"/>
+          </a:p>
+        </p:txBody>
+      </p:sp>
+      <p:sp>
+        <p:nvSpPr>
+          <p:cNvPr id="27" name="Text 25"/>
+          <p:cNvSpPr/>
+          <p:nvPr/>
+        </p:nvSpPr>
+        <p:spPr>
+          <a:xfrm>
+            <a:off x="1280160" y="5440680"/>
+            <a:ext cx="6035040" cy="329184"/>
+          </a:xfrm>
+          <a:prstGeom prst="rect">
+            <a:avLst/>
+          </a:prstGeom>
+          <a:noFill/>
+          <a:ln/>
+        </p:spPr>
+        <p:txBody>
+          <a:bodyPr wrap="square" lIns="0" tIns="0" rIns="0" bIns="0" rtlCol="0" anchor="t"/>
+          <a:lstStyle/>
+          <a:p>
+            <a:pPr indent="0" marL="0">
+              <a:buNone/>
+            </a:pPr>
+            <a:r>
+              <a:rPr lang="th-TH" altLang="en-US" sz="1600" b="1" dirty="0">
+                <a:solidFill>
+                  <a:srgbClr val="23221F"/>
+                </a:solidFill>
+                <a:latin typeface="Leelawadee UI" pitchFamily="34" charset="0"/>
+                <a:ea typeface="Leelawadee UI" pitchFamily="34" charset="-122"/>
+                <a:cs typeface="Leelawadee UI" pitchFamily="34" charset="-120"/>
+              </a:rPr>
+              <a:t>ส่งกระดาษที่ปริ้นให้บัญชี</a:t>
+            </a:r>
+            <a:endParaRPr lang="th-TH" sz="1600" dirty="0"/>
+          </a:p>
+        </p:txBody>
+      </p:sp>
+      <p:sp>
+        <p:nvSpPr>
+          <p:cNvPr id="28" name="Text 26"/>
+          <p:cNvSpPr/>
+          <p:nvPr/>
+        </p:nvSpPr>
+        <p:spPr>
+          <a:xfrm>
+            <a:off x="1280160" y="5769864"/>
+            <a:ext cx="6035040" cy="274320"/>
+          </a:xfrm>
+          <a:prstGeom prst="rect">
+            <a:avLst/>
+          </a:prstGeom>
+          <a:noFill/>
+          <a:ln/>
+        </p:spPr>
+        <p:txBody>
+          <a:bodyPr wrap="square" lIns="0" tIns="0" rIns="0" bIns="0" rtlCol="0" anchor="t"/>
+          <a:lstStyle/>
+          <a:p>
+            <a:pPr indent="0" marL="0">
+              <a:buNone/>
+            </a:pPr>
+            <a:r>
+              <a:rPr lang="th-TH" altLang="en-US" sz="1200" dirty="0">
+                <a:solidFill>
+                  <a:srgbClr val="77736B"/>
+                </a:solidFill>
+                <a:latin typeface="Leelawadee UI Semilight" pitchFamily="34" charset="0"/>
+                <a:ea typeface="Leelawadee UI Semilight" pitchFamily="34" charset="-122"/>
+                <a:cs typeface="Leelawadee UI Semilight" pitchFamily="34" charset="-120"/>
+              </a:rPr>
+              <a:t>ส่งทุกวัน</a:t>
+            </a:r>
+            <a:endParaRPr lang="th-TH" sz="1200" dirty="0"/>
+          </a:p>
+        </p:txBody>
+      </p:sp>
+      <p:sp>
+        <p:nvSpPr>
+          <p:cNvPr id="29" name="Shape 27"/>
           <p:cNvSpPr/>
           <p:nvPr/>
         </p:nvSpPr>
@@ -4059,7 +4532,7 @@
       </p:sp>
       <p:sp>
         <p:nvSpPr>
-          <p:cNvPr id="26" name="Text 24"/>
+          <p:cNvPr id="30" name="Text 28"/>
           <p:cNvSpPr/>
           <p:nvPr/>
         </p:nvSpPr>
@@ -4098,7 +4571,7 @@
       </p:sp>
       <p:sp>
         <p:nvSpPr>
-          <p:cNvPr id="27" name="Shape 25"/>
+          <p:cNvPr id="31" name="Shape 29"/>
           <p:cNvSpPr/>
           <p:nvPr/>
         </p:nvSpPr>
@@ -4125,7 +4598,7 @@
       </p:sp>
       <p:sp>
         <p:nvSpPr>
-          <p:cNvPr id="28" name="Text 26"/>
+          <p:cNvPr id="32" name="Text 30"/>
           <p:cNvSpPr/>
           <p:nvPr/>
         </p:nvSpPr>
@@ -4164,7 +4637,7 @@
       </p:sp>
       <p:sp>
         <p:nvSpPr>
-          <p:cNvPr id="29" name="Shape 27"/>
+          <p:cNvPr id="33" name="Shape 31"/>
           <p:cNvSpPr/>
           <p:nvPr/>
         </p:nvSpPr>
@@ -4191,7 +4664,7 @@
       </p:sp>
       <p:sp>
         <p:nvSpPr>
-          <p:cNvPr id="30" name="Text 28"/>
+          <p:cNvPr id="34" name="Text 32"/>
           <p:cNvSpPr/>
           <p:nvPr/>
         </p:nvSpPr>
@@ -4230,7 +4703,7 @@
       </p:sp>
       <p:sp>
         <p:nvSpPr>
-          <p:cNvPr id="31" name="Shape 29"/>
+          <p:cNvPr id="35" name="Shape 33"/>
           <p:cNvSpPr/>
           <p:nvPr/>
         </p:nvSpPr>
@@ -4257,7 +4730,7 @@
       </p:sp>
       <p:sp>
         <p:nvSpPr>
-          <p:cNvPr id="32" name="Text 30"/>
+          <p:cNvPr id="36" name="Text 34"/>
           <p:cNvSpPr/>
           <p:nvPr/>
         </p:nvSpPr>
@@ -4296,7 +4769,7 @@
       </p:sp>
       <p:sp>
         <p:nvSpPr>
-          <p:cNvPr id="33" name="Shape 31"/>
+          <p:cNvPr id="37" name="Shape 35"/>
           <p:cNvSpPr/>
           <p:nvPr/>
         </p:nvSpPr>
@@ -4323,7 +4796,7 @@
       </p:sp>
       <p:sp>
         <p:nvSpPr>
-          <p:cNvPr id="34" name="Text 32"/>
+          <p:cNvPr id="38" name="Text 36"/>
           <p:cNvSpPr/>
           <p:nvPr/>
         </p:nvSpPr>
@@ -4362,7 +4835,7 @@
       </p:sp>
       <p:sp>
         <p:nvSpPr>
-          <p:cNvPr id="35" name="Shape 33"/>
+          <p:cNvPr id="39" name="Shape 37"/>
           <p:cNvSpPr/>
           <p:nvPr/>
         </p:nvSpPr>
@@ -4389,7 +4862,7 @@
       </p:sp>
       <p:sp>
         <p:nvSpPr>
-          <p:cNvPr id="36" name="Text 34"/>
+          <p:cNvPr id="40" name="Text 38"/>
           <p:cNvSpPr/>
           <p:nvPr/>
         </p:nvSpPr>
@@ -4428,7 +4901,7 @@
       </p:sp>
       <p:sp>
         <p:nvSpPr>
-          <p:cNvPr id="37" name="Shape 35"/>
+          <p:cNvPr id="41" name="Shape 39"/>
           <p:cNvSpPr/>
           <p:nvPr/>
         </p:nvSpPr>
@@ -4455,7 +4928,7 @@
       </p:sp>
       <p:sp>
         <p:nvSpPr>
-          <p:cNvPr id="38" name="Text 36"/>
+          <p:cNvPr id="42" name="Text 40"/>
           <p:cNvSpPr/>
           <p:nvPr/>
         </p:nvSpPr>
@@ -5421,45 +5894,6 @@
           </a:p>
         </p:txBody>
       </p:sp>
-      <p:sp>
-        <p:nvSpPr>
-          <p:cNvPr id="28" name="Text 26"/>
-          <p:cNvSpPr/>
-          <p:nvPr/>
-        </p:nvSpPr>
-        <p:spPr>
-          <a:xfrm>
-            <a:off x="9291676" y="4023360"/>
-            <a:ext cx="1975104" cy="548640"/>
-          </a:xfrm>
-          <a:prstGeom prst="rect">
-            <a:avLst/>
-          </a:prstGeom>
-          <a:noFill/>
-          <a:ln/>
-        </p:spPr>
-        <p:txBody>
-          <a:bodyPr wrap="square" lIns="0" tIns="0" rIns="0" bIns="0" rtlCol="0" anchor="t"/>
-          <a:lstStyle/>
-          <a:p>
-            <a:pPr indent="0" marL="0">
-              <a:buNone/>
-            </a:pPr>
-            <a:r>
-              <a:rPr lang="th-TH" altLang="en-US" sz="1200" dirty="0">
-                <a:solidFill>
-                  <a:srgbClr val="77736B"/>
-                </a:solidFill>
-                <a:latin typeface="Leelawadee UI Semilight" pitchFamily="34" charset="0"/>
-                <a:ea typeface="Leelawadee UI Semilight" pitchFamily="34" charset="-122"/>
-                <a:cs typeface="Leelawadee UI Semilight" pitchFamily="34" charset="-120"/>
-              </a:rPr>
-              <a:t>ต่อเหมือนช่องทาง 1</a:t>
-            </a:r>
-            <a:endParaRPr lang="th-TH" sz="1200" dirty="0"/>
-          </a:p>
-        </p:txBody>
-      </p:sp>
     </p:spTree>
   </p:cSld>
   <p:clrMapOvr>
@@ -6091,7 +6525,7 @@
                 <a:ea typeface="Leelawadee UI Semilight" pitchFamily="34" charset="-122"/>
                 <a:cs typeface="Leelawadee UI Semilight" pitchFamily="34" charset="-120"/>
               </a:rPr>
-              <a:t>ทีมตามบ้าน TRUE ส่งไฟล์ และกระดาษที่ปริ้นให้น้องนิว</a:t>
+              <a:t>ทีมตามบ้าน TRUE ส่งไฟล์ให้น้องนิว และส่งกระดาษที่ปริ้นให้บัญชี</a:t>
             </a:r>
             <a:endParaRPr lang="th-TH" sz="1500" dirty="0"/>
           </a:p>
@@ -6106,11 +6540,11 @@
         <p:spPr>
           <a:xfrm>
             <a:off x="5184648" y="3520440"/>
-            <a:ext cx="1837944" cy="1371600"/>
+            <a:ext cx="1837944" cy="1554480"/>
           </a:xfrm>
           <a:prstGeom prst="roundRect">
             <a:avLst>
-              <a:gd name="adj" fmla="val 5333"/>
+              <a:gd name="adj" fmla="val 4706"/>
             </a:avLst>
           </a:prstGeom>
           <a:solidFill>
@@ -6172,7 +6606,7 @@
         <p:spPr>
           <a:xfrm>
             <a:off x="5367528" y="4160520"/>
-            <a:ext cx="1563624" cy="594360"/>
+            <a:ext cx="1563624" cy="777240"/>
           </a:xfrm>
           <a:prstGeom prst="rect">
             <a:avLst/>
@@ -6213,10 +6647,27 @@
                 <a:ea typeface="Leelawadee UI Semilight" pitchFamily="34" charset="-122"/>
                 <a:cs typeface="Leelawadee UI Semilight" pitchFamily="34" charset="-120"/>
               </a:rPr>
-              <a:t>ส่งไฟล์ให้น้องนิว</a:t>
+              <a:t>คีย์ลงไฟล์</a:t>
             </a:r>
             <a:endParaRPr lang="th-TH" sz="1200" dirty="0"/>
           </a:p>
+          <a:p>
+            <a:pPr indent="0" marL="0">
+              <a:buNone/>
+            </a:pPr>
+            <a:r>
+              <a:rPr lang="th-TH" altLang="en-US" sz="1200" dirty="0">
+                <a:solidFill>
+                  <a:srgbClr val="77736B"/>
+                </a:solidFill>
+                <a:latin typeface="Leelawadee UI Semilight" pitchFamily="34" charset="0"/>
+                <a:ea typeface="Leelawadee UI Semilight" pitchFamily="34" charset="-122"/>
+                <a:cs typeface="Leelawadee UI Semilight" pitchFamily="34" charset="-120"/>
+              </a:rPr>
+              <a:t>ส่งให้น้องนิว</a:t>
+            </a:r>
+            <a:endParaRPr lang="th-TH" sz="1200" dirty="0"/>
+          </a:p>
         </p:txBody>
       </p:sp>
       <p:sp>
@@ -6228,11 +6679,11 @@
         <p:spPr>
           <a:xfrm>
             <a:off x="9665208" y="3520440"/>
-            <a:ext cx="1837944" cy="1371600"/>
+            <a:ext cx="1837944" cy="1554480"/>
           </a:xfrm>
           <a:prstGeom prst="roundRect">
             <a:avLst>
-              <a:gd name="adj" fmla="val 5333"/>
+              <a:gd name="adj" fmla="val 4706"/>
             </a:avLst>
           </a:prstGeom>
           <a:solidFill>
@@ -6294,7 +6745,7 @@
         <p:spPr>
           <a:xfrm>
             <a:off x="9848088" y="4160520"/>
-            <a:ext cx="1563624" cy="594360"/>
+            <a:ext cx="1563624" cy="777240"/>
           </a:xfrm>
           <a:prstGeom prst="rect">
             <a:avLst/>
@@ -6559,12 +7010,12 @@
         </p:nvSpPr>
         <p:spPr>
           <a:xfrm>
-            <a:off x="563728" y="2240280"/>
-            <a:ext cx="2560320" cy="2743200"/>
+            <a:off x="472288" y="2148840"/>
+            <a:ext cx="2103120" cy="2606040"/>
           </a:xfrm>
           <a:prstGeom prst="roundRect">
             <a:avLst>
-              <a:gd name="adj" fmla="val 2857"/>
+              <a:gd name="adj" fmla="val 3478"/>
             </a:avLst>
           </a:prstGeom>
           <a:solidFill>
@@ -6586,8 +7037,8 @@
         </p:nvSpPr>
         <p:spPr>
           <a:xfrm>
-            <a:off x="792328" y="2496312"/>
-            <a:ext cx="2103120" cy="457200"/>
+            <a:off x="700888" y="2404872"/>
+            <a:ext cx="1645920" cy="457200"/>
           </a:xfrm>
           <a:prstGeom prst="rect">
             <a:avLst/>
@@ -6625,7 +7076,7 @@
         </p:nvSpPr>
         <p:spPr>
           <a:xfrm>
-            <a:off x="792328" y="3063240"/>
+            <a:off x="700888" y="2971800"/>
             <a:ext cx="1463040" cy="310896"/>
           </a:xfrm>
           <a:prstGeom prst="roundRect">
@@ -6652,7 +7103,7 @@
         </p:nvSpPr>
         <p:spPr>
           <a:xfrm>
-            <a:off x="792328" y="3063240"/>
+            <a:off x="700888" y="2971800"/>
             <a:ext cx="1463040" cy="310896"/>
           </a:xfrm>
           <a:prstGeom prst="rect">
@@ -6691,8 +7142,8 @@
         </p:nvSpPr>
         <p:spPr>
           <a:xfrm>
-            <a:off x="792328" y="3611880"/>
-            <a:ext cx="2103120" cy="1143000"/>
+            <a:off x="700888" y="3520440"/>
+            <a:ext cx="1737360" cy="1005840"/>
           </a:xfrm>
           <a:prstGeom prst="rect">
             <a:avLst/>
@@ -6712,7 +7163,7 @@
               <a:buChar char="•"/>
             </a:pPr>
             <a:r>
-              <a:rPr lang="th-TH" altLang="en-US" sz="1300" dirty="0">
+              <a:rPr lang="th-TH" altLang="en-US" sz="1200" dirty="0">
                 <a:solidFill>
                   <a:srgbClr val="23221F"/>
                 </a:solidFill>
@@ -6722,7 +7173,7 @@
               </a:rPr>
               <a:t>แยกของเอกสารที่เข้ามา</a:t>
             </a:r>
-            <a:endParaRPr lang="th-TH" sz="1300" dirty="0"/>
+            <a:endParaRPr lang="th-TH" sz="1200" dirty="0"/>
           </a:p>
         </p:txBody>
       </p:sp>
@@ -6734,12 +7185,12 @@
         </p:nvSpPr>
         <p:spPr>
           <a:xfrm>
-            <a:off x="3398368" y="2240280"/>
-            <a:ext cx="2560320" cy="2743200"/>
+            <a:off x="2758288" y="2148840"/>
+            <a:ext cx="2103120" cy="2606040"/>
           </a:xfrm>
           <a:prstGeom prst="roundRect">
             <a:avLst>
-              <a:gd name="adj" fmla="val 2857"/>
+              <a:gd name="adj" fmla="val 3478"/>
             </a:avLst>
           </a:prstGeom>
           <a:solidFill>
@@ -6761,8 +7212,8 @@
         </p:nvSpPr>
         <p:spPr>
           <a:xfrm>
-            <a:off x="3626968" y="2496312"/>
-            <a:ext cx="2103120" cy="457200"/>
+            <a:off x="2986888" y="2404872"/>
+            <a:ext cx="1645920" cy="457200"/>
           </a:xfrm>
           <a:prstGeom prst="rect">
             <a:avLst/>
@@ -6800,7 +7251,7 @@
         </p:nvSpPr>
         <p:spPr>
           <a:xfrm>
-            <a:off x="3626968" y="3063240"/>
+            <a:off x="2986888" y="2971800"/>
             <a:ext cx="1463040" cy="310896"/>
           </a:xfrm>
           <a:prstGeom prst="roundRect">
@@ -6827,7 +7278,7 @@
         </p:nvSpPr>
         <p:spPr>
           <a:xfrm>
-            <a:off x="3626968" y="3063240"/>
+            <a:off x="2986888" y="2971800"/>
             <a:ext cx="1463040" cy="310896"/>
           </a:xfrm>
           <a:prstGeom prst="rect">
@@ -6866,8 +7317,8 @@
         </p:nvSpPr>
         <p:spPr>
           <a:xfrm>
-            <a:off x="3626968" y="3611880"/>
-            <a:ext cx="2103120" cy="1143000"/>
+            <a:off x="2986888" y="3520440"/>
+            <a:ext cx="1737360" cy="1005840"/>
           </a:xfrm>
           <a:prstGeom prst="rect">
             <a:avLst/>
@@ -6887,7 +7338,7 @@
               <a:buChar char="•"/>
             </a:pPr>
             <a:r>
-              <a:rPr lang="th-TH" altLang="en-US" sz="1300" dirty="0">
+              <a:rPr lang="th-TH" altLang="en-US" sz="1200" dirty="0">
                 <a:solidFill>
                   <a:srgbClr val="23221F"/>
                 </a:solidFill>
@@ -6897,7 +7348,7 @@
               </a:rPr>
               <a:t>แกะ และแยกเอกสารกระดาษตามบริษัท</a:t>
             </a:r>
-            <a:endParaRPr lang="th-TH" sz="1300" dirty="0"/>
+            <a:endParaRPr lang="th-TH" sz="1200" dirty="0"/>
           </a:p>
           <a:p>
             <a:pPr marL="177800" indent="-177800">
@@ -6908,7 +7359,7 @@
               <a:buChar char="•"/>
             </a:pPr>
             <a:r>
-              <a:rPr lang="th-TH" altLang="en-US" sz="1300" dirty="0">
+              <a:rPr lang="th-TH" altLang="en-US" sz="1200" dirty="0">
                 <a:solidFill>
                   <a:srgbClr val="23221F"/>
                 </a:solidFill>
@@ -6918,7 +7369,7 @@
               </a:rPr>
               <a:t>ดูของบ้าน T</a:t>
             </a:r>
-            <a:endParaRPr lang="th-TH" sz="1300" dirty="0"/>
+            <a:endParaRPr lang="th-TH" sz="1200" dirty="0"/>
           </a:p>
         </p:txBody>
       </p:sp>
@@ -6930,12 +7381,404 @@
         </p:nvSpPr>
         <p:spPr>
           <a:xfrm>
-            <a:off x="6233008" y="2240280"/>
-            <a:ext cx="2560320" cy="2743200"/>
+            <a:off x="5044288" y="2148840"/>
+            <a:ext cx="2103120" cy="2606040"/>
           </a:xfrm>
           <a:prstGeom prst="roundRect">
             <a:avLst>
-              <a:gd name="adj" fmla="val 2857"/>
+              <a:gd name="adj" fmla="val 3478"/>
+            </a:avLst>
+          </a:prstGeom>
+          <a:solidFill>
+            <a:srgbClr val="FFFFFF"/>
+          </a:solidFill>
+          <a:ln w="12700">
+            <a:solidFill>
+              <a:srgbClr val="E4E2DC"/>
+            </a:solidFill>
+            <a:prstDash val="solid"/>
+          </a:ln>
+        </p:spPr>
+      </p:sp>
+      <p:sp>
+        <p:nvSpPr>
+          <p:cNvPr id="18" name="Text 16"/>
+          <p:cNvSpPr/>
+          <p:nvPr/>
+        </p:nvSpPr>
+        <p:spPr>
+          <a:xfrm>
+            <a:off x="5272888" y="2404872"/>
+            <a:ext cx="1645920" cy="457200"/>
+          </a:xfrm>
+          <a:prstGeom prst="rect">
+            <a:avLst/>
+          </a:prstGeom>
+          <a:noFill/>
+          <a:ln/>
+        </p:spPr>
+        <p:txBody>
+          <a:bodyPr wrap="square" lIns="0" tIns="0" rIns="0" bIns="0" rtlCol="0" anchor="t"/>
+          <a:lstStyle/>
+          <a:p>
+            <a:pPr indent="0" marL="0">
+              <a:buNone/>
+            </a:pPr>
+            <a:r>
+              <a:rPr lang="th-TH" altLang="en-US" sz="2200" b="1" dirty="0">
+                <a:solidFill>
+                  <a:srgbClr val="23221F"/>
+                </a:solidFill>
+                <a:latin typeface="Leelawadee UI" pitchFamily="34" charset="0"/>
+                <a:ea typeface="Leelawadee UI" pitchFamily="34" charset="-122"/>
+                <a:cs typeface="Leelawadee UI" pitchFamily="34" charset="-120"/>
+              </a:rPr>
+              <a:t>พี่นุช</a:t>
+            </a:r>
+            <a:endParaRPr lang="th-TH" sz="2200" dirty="0"/>
+          </a:p>
+        </p:txBody>
+      </p:sp>
+      <p:sp>
+        <p:nvSpPr>
+          <p:cNvPr id="19" name="Shape 17"/>
+          <p:cNvSpPr/>
+          <p:nvPr/>
+        </p:nvSpPr>
+        <p:spPr>
+          <a:xfrm>
+            <a:off x="5272888" y="2971800"/>
+            <a:ext cx="1463040" cy="310896"/>
+          </a:xfrm>
+          <a:prstGeom prst="roundRect">
+            <a:avLst>
+              <a:gd name="adj" fmla="val 50000"/>
+            </a:avLst>
+          </a:prstGeom>
+          <a:solidFill>
+            <a:srgbClr val="F6E9E3"/>
+          </a:solidFill>
+          <a:ln w="12700">
+            <a:solidFill>
+              <a:srgbClr val="F6E9E3"/>
+            </a:solidFill>
+            <a:prstDash val="solid"/>
+          </a:ln>
+        </p:spPr>
+      </p:sp>
+      <p:sp>
+        <p:nvSpPr>
+          <p:cNvPr id="20" name="Text 18"/>
+          <p:cNvSpPr/>
+          <p:nvPr/>
+        </p:nvSpPr>
+        <p:spPr>
+          <a:xfrm>
+            <a:off x="5272888" y="2971800"/>
+            <a:ext cx="1463040" cy="310896"/>
+          </a:xfrm>
+          <a:prstGeom prst="rect">
+            <a:avLst/>
+          </a:prstGeom>
+          <a:noFill/>
+          <a:ln/>
+        </p:spPr>
+        <p:txBody>
+          <a:bodyPr wrap="square" lIns="0" tIns="0" rIns="0" bIns="0" rtlCol="0" anchor="ctr"/>
+          <a:lstStyle/>
+          <a:p>
+            <a:pPr algn="ctr" indent="0" marL="0">
+              <a:buNone/>
+            </a:pPr>
+            <a:r>
+              <a:rPr lang="th-TH" altLang="en-US" sz="1100" b="1" dirty="0">
+                <a:solidFill>
+                  <a:srgbClr val="B8502E"/>
+                </a:solidFill>
+                <a:latin typeface="Leelawadee UI" pitchFamily="34" charset="0"/>
+                <a:ea typeface="Leelawadee UI" pitchFamily="34" charset="-122"/>
+                <a:cs typeface="Leelawadee UI" pitchFamily="34" charset="-120"/>
+              </a:rPr>
+              <a:t>ทีมตาม TRUE</a:t>
+            </a:r>
+            <a:endParaRPr lang="th-TH" sz="1100" dirty="0"/>
+          </a:p>
+        </p:txBody>
+      </p:sp>
+      <p:sp>
+        <p:nvSpPr>
+          <p:cNvPr id="21" name="Text 19"/>
+          <p:cNvSpPr/>
+          <p:nvPr/>
+        </p:nvSpPr>
+        <p:spPr>
+          <a:xfrm>
+            <a:off x="5272888" y="3520440"/>
+            <a:ext cx="1737360" cy="1005840"/>
+          </a:xfrm>
+          <a:prstGeom prst="rect">
+            <a:avLst/>
+          </a:prstGeom>
+          <a:noFill/>
+          <a:ln/>
+        </p:spPr>
+        <p:txBody>
+          <a:bodyPr wrap="square" lIns="0" tIns="0" rIns="0" bIns="0" rtlCol="0" anchor="t"/>
+          <a:lstStyle/>
+          <a:p>
+            <a:pPr marL="177800" indent="-177800">
+              <a:spcAft>
+                <a:spcPts val="600"/>
+              </a:spcAft>
+              <a:buSzPct val="100000"/>
+              <a:buChar char="•"/>
+            </a:pPr>
+            <a:r>
+              <a:rPr lang="th-TH" altLang="en-US" sz="1200" dirty="0">
+                <a:solidFill>
+                  <a:srgbClr val="23221F"/>
+                </a:solidFill>
+                <a:latin typeface="Leelawadee UI Semilight" pitchFamily="34" charset="0"/>
+                <a:ea typeface="Leelawadee UI Semilight" pitchFamily="34" charset="-122"/>
+                <a:cs typeface="Leelawadee UI Semilight" pitchFamily="34" charset="-120"/>
+              </a:rPr>
+              <a:t>ตามยอดของ BD&amp;T บ้าน TRUE</a:t>
+            </a:r>
+            <a:endParaRPr lang="th-TH" sz="1200" dirty="0"/>
+          </a:p>
+        </p:txBody>
+      </p:sp>
+      <p:sp>
+        <p:nvSpPr>
+          <p:cNvPr id="22" name="Shape 20"/>
+          <p:cNvSpPr/>
+          <p:nvPr/>
+        </p:nvSpPr>
+        <p:spPr>
+          <a:xfrm>
+            <a:off x="7330288" y="2148840"/>
+            <a:ext cx="2103120" cy="2606040"/>
+          </a:xfrm>
+          <a:prstGeom prst="roundRect">
+            <a:avLst>
+              <a:gd name="adj" fmla="val 3478"/>
+            </a:avLst>
+          </a:prstGeom>
+          <a:solidFill>
+            <a:srgbClr val="FFFFFF"/>
+          </a:solidFill>
+          <a:ln w="12700">
+            <a:solidFill>
+              <a:srgbClr val="E4E2DC"/>
+            </a:solidFill>
+            <a:prstDash val="solid"/>
+          </a:ln>
+        </p:spPr>
+      </p:sp>
+      <p:sp>
+        <p:nvSpPr>
+          <p:cNvPr id="23" name="Text 21"/>
+          <p:cNvSpPr/>
+          <p:nvPr/>
+        </p:nvSpPr>
+        <p:spPr>
+          <a:xfrm>
+            <a:off x="7558888" y="2404872"/>
+            <a:ext cx="1645920" cy="457200"/>
+          </a:xfrm>
+          <a:prstGeom prst="rect">
+            <a:avLst/>
+          </a:prstGeom>
+          <a:noFill/>
+          <a:ln/>
+        </p:spPr>
+        <p:txBody>
+          <a:bodyPr wrap="square" lIns="0" tIns="0" rIns="0" bIns="0" rtlCol="0" anchor="t"/>
+          <a:lstStyle/>
+          <a:p>
+            <a:pPr indent="0" marL="0">
+              <a:buNone/>
+            </a:pPr>
+            <a:r>
+              <a:rPr lang="th-TH" altLang="en-US" sz="2200" b="1" dirty="0">
+                <a:solidFill>
+                  <a:srgbClr val="23221F"/>
+                </a:solidFill>
+                <a:latin typeface="Leelawadee UI" pitchFamily="34" charset="0"/>
+                <a:ea typeface="Leelawadee UI" pitchFamily="34" charset="-122"/>
+                <a:cs typeface="Leelawadee UI" pitchFamily="34" charset="-120"/>
+              </a:rPr>
+              <a:t>พี่บิว</a:t>
+            </a:r>
+            <a:endParaRPr lang="th-TH" sz="2200" dirty="0"/>
+          </a:p>
+        </p:txBody>
+      </p:sp>
+      <p:sp>
+        <p:nvSpPr>
+          <p:cNvPr id="24" name="Shape 22"/>
+          <p:cNvSpPr/>
+          <p:nvPr/>
+        </p:nvSpPr>
+        <p:spPr>
+          <a:xfrm>
+            <a:off x="7558888" y="2971800"/>
+            <a:ext cx="1463040" cy="310896"/>
+          </a:xfrm>
+          <a:prstGeom prst="roundRect">
+            <a:avLst>
+              <a:gd name="adj" fmla="val 50000"/>
+            </a:avLst>
+          </a:prstGeom>
+          <a:solidFill>
+            <a:srgbClr val="F6E9E3"/>
+          </a:solidFill>
+          <a:ln w="12700">
+            <a:solidFill>
+              <a:srgbClr val="F6E9E3"/>
+            </a:solidFill>
+            <a:prstDash val="solid"/>
+          </a:ln>
+        </p:spPr>
+      </p:sp>
+      <p:sp>
+        <p:nvSpPr>
+          <p:cNvPr id="25" name="Text 23"/>
+          <p:cNvSpPr/>
+          <p:nvPr/>
+        </p:nvSpPr>
+        <p:spPr>
+          <a:xfrm>
+            <a:off x="7558888" y="2971800"/>
+            <a:ext cx="1463040" cy="310896"/>
+          </a:xfrm>
+          <a:prstGeom prst="rect">
+            <a:avLst/>
+          </a:prstGeom>
+          <a:noFill/>
+          <a:ln/>
+        </p:spPr>
+        <p:txBody>
+          <a:bodyPr wrap="square" lIns="0" tIns="0" rIns="0" bIns="0" rtlCol="0" anchor="ctr"/>
+          <a:lstStyle/>
+          <a:p>
+            <a:pPr algn="ctr" indent="0" marL="0">
+              <a:buNone/>
+            </a:pPr>
+            <a:r>
+              <a:rPr lang="th-TH" altLang="en-US" sz="1100" b="1" dirty="0">
+                <a:solidFill>
+                  <a:srgbClr val="B8502E"/>
+                </a:solidFill>
+                <a:latin typeface="Leelawadee UI" pitchFamily="34" charset="0"/>
+                <a:ea typeface="Leelawadee UI" pitchFamily="34" charset="-122"/>
+                <a:cs typeface="Leelawadee UI" pitchFamily="34" charset="-120"/>
+              </a:rPr>
+              <a:t>ทีมตาม DTAC</a:t>
+            </a:r>
+            <a:endParaRPr lang="th-TH" sz="1100" dirty="0"/>
+          </a:p>
+        </p:txBody>
+      </p:sp>
+      <p:sp>
+        <p:nvSpPr>
+          <p:cNvPr id="26" name="Text 24"/>
+          <p:cNvSpPr/>
+          <p:nvPr/>
+        </p:nvSpPr>
+        <p:spPr>
+          <a:xfrm>
+            <a:off x="7558888" y="3520440"/>
+            <a:ext cx="1737360" cy="1005840"/>
+          </a:xfrm>
+          <a:prstGeom prst="rect">
+            <a:avLst/>
+          </a:prstGeom>
+          <a:noFill/>
+          <a:ln/>
+        </p:spPr>
+        <p:txBody>
+          <a:bodyPr wrap="square" lIns="0" tIns="0" rIns="0" bIns="0" rtlCol="0" anchor="t"/>
+          <a:lstStyle/>
+          <a:p>
+            <a:pPr marL="177800" indent="-177800">
+              <a:spcAft>
+                <a:spcPts val="600"/>
+              </a:spcAft>
+              <a:buSzPct val="100000"/>
+              <a:buChar char="•"/>
+            </a:pPr>
+            <a:r>
+              <a:rPr lang="th-TH" altLang="en-US" sz="1200" dirty="0">
+                <a:solidFill>
+                  <a:srgbClr val="23221F"/>
+                </a:solidFill>
+                <a:latin typeface="Leelawadee UI Semilight" pitchFamily="34" charset="0"/>
+                <a:ea typeface="Leelawadee UI Semilight" pitchFamily="34" charset="-122"/>
+                <a:cs typeface="Leelawadee UI Semilight" pitchFamily="34" charset="-120"/>
+              </a:rPr>
+              <a:t>ตามเอกสารบ้าน DTAC</a:t>
+            </a:r>
+            <a:endParaRPr lang="th-TH" sz="1200" dirty="0"/>
+          </a:p>
+          <a:p>
+            <a:pPr marL="177800" indent="-177800">
+              <a:spcAft>
+                <a:spcPts val="600"/>
+              </a:spcAft>
+              <a:buSzPct val="100000"/>
+              <a:buChar char="•"/>
+            </a:pPr>
+            <a:r>
+              <a:rPr lang="th-TH" altLang="en-US" sz="1200" dirty="0">
+                <a:solidFill>
+                  <a:srgbClr val="23221F"/>
+                </a:solidFill>
+                <a:latin typeface="Leelawadee UI Semilight" pitchFamily="34" charset="0"/>
+                <a:ea typeface="Leelawadee UI Semilight" pitchFamily="34" charset="-122"/>
+                <a:cs typeface="Leelawadee UI Semilight" pitchFamily="34" charset="-120"/>
+              </a:rPr>
+              <a:t>คีย์ลงไฟล์</a:t>
+            </a:r>
+            <a:endParaRPr lang="th-TH" sz="1200" dirty="0"/>
+          </a:p>
+          <a:p>
+            <a:pPr marL="177800" indent="-177800">
+              <a:spcAft>
+                <a:spcPts val="600"/>
+              </a:spcAft>
+              <a:buSzPct val="100000"/>
+              <a:buChar char="•"/>
+            </a:pPr>
+            <a:r>
+              <a:rPr lang="th-TH" altLang="en-US" sz="1200" dirty="0">
+                <a:solidFill>
+                  <a:srgbClr val="23221F"/>
+                </a:solidFill>
+                <a:latin typeface="Leelawadee UI Semilight" pitchFamily="34" charset="0"/>
+                <a:ea typeface="Leelawadee UI Semilight" pitchFamily="34" charset="-122"/>
+                <a:cs typeface="Leelawadee UI Semilight" pitchFamily="34" charset="-120"/>
+              </a:rPr>
+              <a:t>ส่งน้องนิวทุกวันพุธ</a:t>
+            </a:r>
+            <a:endParaRPr lang="th-TH" sz="1200" dirty="0"/>
+          </a:p>
+        </p:txBody>
+      </p:sp>
+      <p:sp>
+        <p:nvSpPr>
+          <p:cNvPr id="27" name="Shape 25"/>
+          <p:cNvSpPr/>
+          <p:nvPr/>
+        </p:nvSpPr>
+        <p:spPr>
+          <a:xfrm>
+            <a:off x="9616288" y="2148840"/>
+            <a:ext cx="2103120" cy="2606040"/>
+          </a:xfrm>
+          <a:prstGeom prst="roundRect">
+            <a:avLst>
+              <a:gd name="adj" fmla="val 3478"/>
             </a:avLst>
           </a:prstGeom>
           <a:solidFill>
@@ -6951,14 +7794,14 @@
       </p:sp>
       <p:sp>
         <p:nvSpPr>
-          <p:cNvPr id="18" name="Text 16"/>
-          <p:cNvSpPr/>
-          <p:nvPr/>
-        </p:nvSpPr>
-        <p:spPr>
-          <a:xfrm>
-            <a:off x="6461608" y="2496312"/>
-            <a:ext cx="2103120" cy="457200"/>
+          <p:cNvPr id="28" name="Text 26"/>
+          <p:cNvSpPr/>
+          <p:nvPr/>
+        </p:nvSpPr>
+        <p:spPr>
+          <a:xfrm>
+            <a:off x="9844888" y="2404872"/>
+            <a:ext cx="1645920" cy="457200"/>
           </a:xfrm>
           <a:prstGeom prst="rect">
             <a:avLst/>
@@ -6990,13 +7833,13 @@
       </p:sp>
       <p:sp>
         <p:nvSpPr>
-          <p:cNvPr id="19" name="Shape 17"/>
-          <p:cNvSpPr/>
-          <p:nvPr/>
-        </p:nvSpPr>
-        <p:spPr>
-          <a:xfrm>
-            <a:off x="6461608" y="3063240"/>
+          <p:cNvPr id="29" name="Shape 27"/>
+          <p:cNvSpPr/>
+          <p:nvPr/>
+        </p:nvSpPr>
+        <p:spPr>
+          <a:xfrm>
+            <a:off x="9844888" y="2971800"/>
             <a:ext cx="1463040" cy="310896"/>
           </a:xfrm>
           <a:prstGeom prst="roundRect">
@@ -7017,13 +7860,13 @@
       </p:sp>
       <p:sp>
         <p:nvSpPr>
-          <p:cNvPr id="20" name="Text 18"/>
-          <p:cNvSpPr/>
-          <p:nvPr/>
-        </p:nvSpPr>
-        <p:spPr>
-          <a:xfrm>
-            <a:off x="6461608" y="3063240"/>
+          <p:cNvPr id="30" name="Text 28"/>
+          <p:cNvSpPr/>
+          <p:nvPr/>
+        </p:nvSpPr>
+        <p:spPr>
+          <a:xfrm>
+            <a:off x="9844888" y="2971800"/>
             <a:ext cx="1463040" cy="310896"/>
           </a:xfrm>
           <a:prstGeom prst="rect">
@@ -7056,14 +7899,14 @@
       </p:sp>
       <p:sp>
         <p:nvSpPr>
-          <p:cNvPr id="21" name="Text 19"/>
-          <p:cNvSpPr/>
-          <p:nvPr/>
-        </p:nvSpPr>
-        <p:spPr>
-          <a:xfrm>
-            <a:off x="6461608" y="3611880"/>
-            <a:ext cx="2103120" cy="1143000"/>
+          <p:cNvPr id="31" name="Text 29"/>
+          <p:cNvSpPr/>
+          <p:nvPr/>
+        </p:nvSpPr>
+        <p:spPr>
+          <a:xfrm>
+            <a:off x="9844888" y="3520440"/>
+            <a:ext cx="1737360" cy="1005840"/>
           </a:xfrm>
           <a:prstGeom prst="rect">
             <a:avLst/>
@@ -7083,7 +7926,7 @@
               <a:buChar char="•"/>
             </a:pPr>
             <a:r>
-              <a:rPr lang="th-TH" altLang="en-US" sz="1300" dirty="0">
+              <a:rPr lang="th-TH" altLang="en-US" sz="1200" dirty="0">
                 <a:solidFill>
                   <a:srgbClr val="23221F"/>
                 </a:solidFill>
@@ -7093,7 +7936,7 @@
               </a:rPr>
               <a:t>รับไฟล์จากทุกคน</a:t>
             </a:r>
-            <a:endParaRPr lang="th-TH" sz="1300" dirty="0"/>
+            <a:endParaRPr lang="th-TH" sz="1200" dirty="0"/>
           </a:p>
           <a:p>
             <a:pPr marL="177800" indent="-177800">
@@ -7104,7 +7947,7 @@
               <a:buChar char="•"/>
             </a:pPr>
             <a:r>
-              <a:rPr lang="th-TH" altLang="en-US" sz="1300" dirty="0">
+              <a:rPr lang="th-TH" altLang="en-US" sz="1200" dirty="0">
                 <a:solidFill>
                   <a:srgbClr val="23221F"/>
                 </a:solidFill>
@@ -7114,7 +7957,7 @@
               </a:rPr>
               <a:t>ทำไฟล์เปลี่ยน Status Pending → Waiting</a:t>
             </a:r>
-            <a:endParaRPr lang="th-TH" sz="1300" dirty="0"/>
+            <a:endParaRPr lang="th-TH" sz="1200" dirty="0"/>
           </a:p>
           <a:p>
             <a:pPr marL="177800" indent="-177800">
@@ -7125,7 +7968,7 @@
               <a:buChar char="•"/>
             </a:pPr>
             <a:r>
-              <a:rPr lang="th-TH" altLang="en-US" sz="1300" dirty="0">
+              <a:rPr lang="th-TH" altLang="en-US" sz="1200" dirty="0">
                 <a:solidFill>
                   <a:srgbClr val="23221F"/>
                 </a:solidFill>
@@ -7135,203 +7978,7 @@
               </a:rPr>
               <a:t>อัปเดต Report ทุกวันศุกร์</a:t>
             </a:r>
-            <a:endParaRPr lang="th-TH" sz="1300" dirty="0"/>
-          </a:p>
-        </p:txBody>
-      </p:sp>
-      <p:sp>
-        <p:nvSpPr>
-          <p:cNvPr id="22" name="Shape 20"/>
-          <p:cNvSpPr/>
-          <p:nvPr/>
-        </p:nvSpPr>
-        <p:spPr>
-          <a:xfrm>
-            <a:off x="9067648" y="2240280"/>
-            <a:ext cx="2560320" cy="2743200"/>
-          </a:xfrm>
-          <a:prstGeom prst="roundRect">
-            <a:avLst>
-              <a:gd name="adj" fmla="val 2857"/>
-            </a:avLst>
-          </a:prstGeom>
-          <a:solidFill>
-            <a:srgbClr val="FFFFFF"/>
-          </a:solidFill>
-          <a:ln w="12700">
-            <a:solidFill>
-              <a:srgbClr val="E4E2DC"/>
-            </a:solidFill>
-            <a:prstDash val="solid"/>
-          </a:ln>
-        </p:spPr>
-      </p:sp>
-      <p:sp>
-        <p:nvSpPr>
-          <p:cNvPr id="23" name="Text 21"/>
-          <p:cNvSpPr/>
-          <p:nvPr/>
-        </p:nvSpPr>
-        <p:spPr>
-          <a:xfrm>
-            <a:off x="9296248" y="2496312"/>
-            <a:ext cx="2103120" cy="457200"/>
-          </a:xfrm>
-          <a:prstGeom prst="rect">
-            <a:avLst/>
-          </a:prstGeom>
-          <a:noFill/>
-          <a:ln/>
-        </p:spPr>
-        <p:txBody>
-          <a:bodyPr wrap="square" lIns="0" tIns="0" rIns="0" bIns="0" rtlCol="0" anchor="t"/>
-          <a:lstStyle/>
-          <a:p>
-            <a:pPr indent="0" marL="0">
-              <a:buNone/>
-            </a:pPr>
-            <a:r>
-              <a:rPr lang="th-TH" altLang="en-US" sz="2200" b="1" dirty="0">
-                <a:solidFill>
-                  <a:srgbClr val="23221F"/>
-                </a:solidFill>
-                <a:latin typeface="Leelawadee UI" pitchFamily="34" charset="0"/>
-                <a:ea typeface="Leelawadee UI" pitchFamily="34" charset="-122"/>
-                <a:cs typeface="Leelawadee UI" pitchFamily="34" charset="-120"/>
-              </a:rPr>
-              <a:t>พี่บิว</a:t>
-            </a:r>
-            <a:endParaRPr lang="th-TH" sz="2200" dirty="0"/>
-          </a:p>
-        </p:txBody>
-      </p:sp>
-      <p:sp>
-        <p:nvSpPr>
-          <p:cNvPr id="24" name="Shape 22"/>
-          <p:cNvSpPr/>
-          <p:nvPr/>
-        </p:nvSpPr>
-        <p:spPr>
-          <a:xfrm>
-            <a:off x="9296248" y="3063240"/>
-            <a:ext cx="1463040" cy="310896"/>
-          </a:xfrm>
-          <a:prstGeom prst="roundRect">
-            <a:avLst>
-              <a:gd name="adj" fmla="val 50000"/>
-            </a:avLst>
-          </a:prstGeom>
-          <a:solidFill>
-            <a:srgbClr val="F6E9E3"/>
-          </a:solidFill>
-          <a:ln w="12700">
-            <a:solidFill>
-              <a:srgbClr val="F6E9E3"/>
-            </a:solidFill>
-            <a:prstDash val="solid"/>
-          </a:ln>
-        </p:spPr>
-      </p:sp>
-      <p:sp>
-        <p:nvSpPr>
-          <p:cNvPr id="25" name="Text 23"/>
-          <p:cNvSpPr/>
-          <p:nvPr/>
-        </p:nvSpPr>
-        <p:spPr>
-          <a:xfrm>
-            <a:off x="9296248" y="3063240"/>
-            <a:ext cx="1463040" cy="310896"/>
-          </a:xfrm>
-          <a:prstGeom prst="rect">
-            <a:avLst/>
-          </a:prstGeom>
-          <a:noFill/>
-          <a:ln/>
-        </p:spPr>
-        <p:txBody>
-          <a:bodyPr wrap="square" lIns="0" tIns="0" rIns="0" bIns="0" rtlCol="0" anchor="ctr"/>
-          <a:lstStyle/>
-          <a:p>
-            <a:pPr algn="ctr" indent="0" marL="0">
-              <a:buNone/>
-            </a:pPr>
-            <a:r>
-              <a:rPr lang="th-TH" altLang="en-US" sz="1100" b="1" dirty="0">
-                <a:solidFill>
-                  <a:srgbClr val="B8502E"/>
-                </a:solidFill>
-                <a:latin typeface="Leelawadee UI" pitchFamily="34" charset="0"/>
-                <a:ea typeface="Leelawadee UI" pitchFamily="34" charset="-122"/>
-                <a:cs typeface="Leelawadee UI" pitchFamily="34" charset="-120"/>
-              </a:rPr>
-              <a:t>ทีมตาม DTAC</a:t>
-            </a:r>
-            <a:endParaRPr lang="th-TH" sz="1100" dirty="0"/>
-          </a:p>
-        </p:txBody>
-      </p:sp>
-      <p:sp>
-        <p:nvSpPr>
-          <p:cNvPr id="26" name="Text 24"/>
-          <p:cNvSpPr/>
-          <p:nvPr/>
-        </p:nvSpPr>
-        <p:spPr>
-          <a:xfrm>
-            <a:off x="9296248" y="3611880"/>
-            <a:ext cx="2103120" cy="1143000"/>
-          </a:xfrm>
-          <a:prstGeom prst="rect">
-            <a:avLst/>
-          </a:prstGeom>
-          <a:noFill/>
-          <a:ln/>
-        </p:spPr>
-        <p:txBody>
-          <a:bodyPr wrap="square" lIns="0" tIns="0" rIns="0" bIns="0" rtlCol="0" anchor="t"/>
-          <a:lstStyle/>
-          <a:p>
-            <a:pPr marL="177800" indent="-177800">
-              <a:spcAft>
-                <a:spcPts val="600"/>
-              </a:spcAft>
-              <a:buSzPct val="100000"/>
-              <a:buChar char="•"/>
-            </a:pPr>
-            <a:r>
-              <a:rPr lang="th-TH" altLang="en-US" sz="1300" dirty="0">
-                <a:solidFill>
-                  <a:srgbClr val="23221F"/>
-                </a:solidFill>
-                <a:latin typeface="Leelawadee UI Semilight" pitchFamily="34" charset="0"/>
-                <a:ea typeface="Leelawadee UI Semilight" pitchFamily="34" charset="-122"/>
-                <a:cs typeface="Leelawadee UI Semilight" pitchFamily="34" charset="-120"/>
-              </a:rPr>
-              <a:t>ตามเอกสารบ้าน DTAC</a:t>
-            </a:r>
-            <a:endParaRPr lang="th-TH" sz="1300" dirty="0"/>
-          </a:p>
-          <a:p>
-            <a:pPr marL="177800" indent="-177800">
-              <a:spcAft>
-                <a:spcPts val="600"/>
-              </a:spcAft>
-              <a:buSzPct val="100000"/>
-              <a:buChar char="•"/>
-            </a:pPr>
-            <a:r>
-              <a:rPr lang="th-TH" altLang="en-US" sz="1300" dirty="0">
-                <a:solidFill>
-                  <a:srgbClr val="23221F"/>
-                </a:solidFill>
-                <a:latin typeface="Leelawadee UI Semilight" pitchFamily="34" charset="0"/>
-                <a:ea typeface="Leelawadee UI Semilight" pitchFamily="34" charset="-122"/>
-                <a:cs typeface="Leelawadee UI Semilight" pitchFamily="34" charset="-120"/>
-              </a:rPr>
-              <a:t>ส่งไฟล์ให้น้องนิวทุกวันพุธ</a:t>
-            </a:r>
-            <a:endParaRPr lang="th-TH" sz="1300" dirty="0"/>
+            <a:endParaRPr lang="th-TH" sz="1200" dirty="0"/>
           </a:p>
         </p:txBody>
       </p:sp>
